--- a/pitch_deck.pptx
+++ b/pitch_deck.pptx
@@ -6,6 +6,9 @@
   </p:sldMasterIdLst>
   <p:sldIdLst>
     <p:sldId id="256" r:id="rId2"/>
+    <p:sldId id="257" r:id="rId3"/>
+    <p:sldId id="258" r:id="rId4"/>
+    <p:sldId id="259" r:id="rId5"/>
   </p:sldIdLst>
   <p:sldSz cx="12192000" cy="6858000"/>
   <p:notesSz cx="6858000" cy="9144000"/>
@@ -104,6 +107,11 @@
       </a:defRPr>
     </a:lvl9pPr>
   </p:defaultTextStyle>
+  <p:extLst>
+    <p:ext uri="{EFAFB233-063F-42B5-8137-9DF3F51BA10A}">
+      <p15:sldGuideLst xmlns:p15="http://schemas.microsoft.com/office/powerpoint/2012/main"/>
+    </p:ext>
+  </p:extLst>
 </p:presentation>
 </file>
 
@@ -3391,6 +3399,438 @@
 </p:sld>
 </file>
 
+<file path=ppt/slides/slide2.xml><?xml version="1.0" encoding="utf-8"?>
+<p:sld xmlns:a="http://schemas.openxmlformats.org/drawingml/2006/main" xmlns:r="http://schemas.openxmlformats.org/officeDocument/2006/relationships" xmlns:p="http://schemas.openxmlformats.org/presentationml/2006/main">
+  <p:cSld>
+    <p:spTree>
+      <p:nvGrpSpPr>
+        <p:cNvPr id="1" name=""/>
+        <p:cNvGrpSpPr/>
+        <p:nvPr/>
+      </p:nvGrpSpPr>
+      <p:grpSpPr>
+        <a:xfrm>
+          <a:off x="0" y="0"/>
+          <a:ext cx="0" cy="0"/>
+          <a:chOff x="0" y="0"/>
+          <a:chExt cx="0" cy="0"/>
+        </a:xfrm>
+      </p:grpSpPr>
+      <p:sp>
+        <p:nvSpPr>
+          <p:cNvPr id="2" name="Title 1">
+            <a:extLst>
+              <a:ext uri="{FF2B5EF4-FFF2-40B4-BE49-F238E27FC236}">
+                <a16:creationId xmlns:a16="http://schemas.microsoft.com/office/drawing/2014/main" id="{9121EE63-9A5A-7812-56E7-404A51894BFD}"/>
+              </a:ext>
+            </a:extLst>
+          </p:cNvPr>
+          <p:cNvSpPr>
+            <a:spLocks noGrp="1"/>
+          </p:cNvSpPr>
+          <p:nvPr>
+            <p:ph type="title"/>
+          </p:nvPr>
+        </p:nvSpPr>
+        <p:spPr/>
+        <p:txBody>
+          <a:bodyPr>
+            <a:normAutofit/>
+          </a:bodyPr>
+          <a:lstStyle/>
+          <a:p>
+            <a:r>
+              <a:rPr lang="en-GB" sz="2800" dirty="0">
+                <a:effectLst/>
+                <a:latin typeface="Calibri" panose="020F0502020204030204" pitchFamily="34" charset="0"/>
+              </a:rPr>
+              <a:t>Preventing poor planning with community empowerment</a:t>
+            </a:r>
+            <a:br>
+              <a:rPr lang="en-GB" sz="2800" dirty="0">
+                <a:effectLst/>
+                <a:latin typeface="Calibri" panose="020F0502020204030204" pitchFamily="34" charset="0"/>
+              </a:rPr>
+            </a:br>
+            <a:endParaRPr lang="en-GB" sz="6000" dirty="0"/>
+          </a:p>
+        </p:txBody>
+      </p:sp>
+      <p:sp>
+        <p:nvSpPr>
+          <p:cNvPr id="3" name="Content Placeholder 2">
+            <a:extLst>
+              <a:ext uri="{FF2B5EF4-FFF2-40B4-BE49-F238E27FC236}">
+                <a16:creationId xmlns:a16="http://schemas.microsoft.com/office/drawing/2014/main" id="{9A834894-FCEA-B8B7-D944-A45DF6B793A7}"/>
+              </a:ext>
+            </a:extLst>
+          </p:cNvPr>
+          <p:cNvSpPr>
+            <a:spLocks noGrp="1"/>
+          </p:cNvSpPr>
+          <p:nvPr>
+            <p:ph idx="1"/>
+          </p:nvPr>
+        </p:nvSpPr>
+        <p:spPr/>
+        <p:txBody>
+          <a:bodyPr>
+            <a:normAutofit/>
+          </a:bodyPr>
+          <a:lstStyle/>
+          <a:p>
+            <a:r>
+              <a:rPr lang="en-GB" sz="1600" dirty="0">
+                <a:effectLst/>
+                <a:latin typeface="Arial" panose="020B0604020202020204" pitchFamily="34" charset="0"/>
+                <a:cs typeface="Arial" panose="020B0604020202020204" pitchFamily="34" charset="0"/>
+              </a:rPr>
+              <a:t> </a:t>
+            </a:r>
+            <a:r>
+              <a:rPr lang="en-GB" sz="1600" dirty="0" err="1">
+                <a:effectLst/>
+                <a:latin typeface="Arial" panose="020B0604020202020204" pitchFamily="34" charset="0"/>
+                <a:cs typeface="Arial" panose="020B0604020202020204" pitchFamily="34" charset="0"/>
+              </a:rPr>
+              <a:t>OnBalance</a:t>
+            </a:r>
+            <a:r>
+              <a:rPr lang="en-GB" sz="1600" dirty="0">
+                <a:effectLst/>
+                <a:latin typeface="Arial" panose="020B0604020202020204" pitchFamily="34" charset="0"/>
+                <a:cs typeface="Arial" panose="020B0604020202020204" pitchFamily="34" charset="0"/>
+              </a:rPr>
+              <a:t> — a platform designed to make housing planning smarter, more transparent, and more inclusive.</a:t>
+            </a:r>
+          </a:p>
+          <a:p>
+            <a:r>
+              <a:rPr lang="en-GB" sz="1600" dirty="0">
+                <a:latin typeface="Arial" panose="020B0604020202020204" pitchFamily="34" charset="0"/>
+                <a:cs typeface="Arial" panose="020B0604020202020204" pitchFamily="34" charset="0"/>
+              </a:rPr>
+              <a:t>The problem</a:t>
+            </a:r>
+          </a:p>
+          <a:p>
+            <a:pPr lvl="1"/>
+            <a:r>
+              <a:rPr lang="en-GB" sz="1200" dirty="0">
+                <a:latin typeface="Arial" panose="020B0604020202020204" pitchFamily="34" charset="0"/>
+                <a:cs typeface="Arial" panose="020B0604020202020204" pitchFamily="34" charset="0"/>
+              </a:rPr>
+              <a:t>Fragmented data</a:t>
+            </a:r>
+          </a:p>
+          <a:p>
+            <a:pPr lvl="1"/>
+            <a:r>
+              <a:rPr lang="en-GB" sz="1200" dirty="0">
+                <a:latin typeface="Arial" panose="020B0604020202020204" pitchFamily="34" charset="0"/>
+                <a:cs typeface="Arial" panose="020B0604020202020204" pitchFamily="34" charset="0"/>
+              </a:rPr>
+              <a:t>Opaque processes and decision making -&gt; lack of trust with community</a:t>
+            </a:r>
+          </a:p>
+          <a:p>
+            <a:pPr lvl="1"/>
+            <a:r>
+              <a:rPr lang="en-GB" sz="1200" dirty="0">
+                <a:latin typeface="Arial" panose="020B0604020202020204" pitchFamily="34" charset="0"/>
+                <a:cs typeface="Arial" panose="020B0604020202020204" pitchFamily="34" charset="0"/>
+              </a:rPr>
+              <a:t>Time consuming planning consultations to personalise constraint priorities on balance</a:t>
+            </a:r>
+          </a:p>
+          <a:p>
+            <a:pPr lvl="1"/>
+            <a:r>
+              <a:rPr lang="en-GB" sz="1200" dirty="0">
+                <a:latin typeface="Arial" panose="020B0604020202020204" pitchFamily="34" charset="0"/>
+                <a:cs typeface="Arial" panose="020B0604020202020204" pitchFamily="34" charset="0"/>
+              </a:rPr>
+              <a:t>No way to predict how changes in constraint priorities impact housing capacity</a:t>
+            </a:r>
+          </a:p>
+          <a:p>
+            <a:pPr marL="457200" lvl="1" indent="0">
+              <a:buNone/>
+            </a:pPr>
+            <a:endParaRPr lang="en-GB" sz="1200" dirty="0">
+              <a:latin typeface="Arial" panose="020B0604020202020204" pitchFamily="34" charset="0"/>
+              <a:cs typeface="Arial" panose="020B0604020202020204" pitchFamily="34" charset="0"/>
+            </a:endParaRPr>
+          </a:p>
+          <a:p>
+            <a:r>
+              <a:rPr lang="en-GB" sz="1600" dirty="0">
+                <a:latin typeface="Arial" panose="020B0604020202020204" pitchFamily="34" charset="0"/>
+                <a:cs typeface="Arial" panose="020B0604020202020204" pitchFamily="34" charset="0"/>
+              </a:rPr>
+              <a:t>The answer</a:t>
+            </a:r>
+          </a:p>
+          <a:p>
+            <a:pPr lvl="1"/>
+            <a:r>
+              <a:rPr lang="en-GB" sz="1200" dirty="0">
+                <a:latin typeface="Arial" panose="020B0604020202020204" pitchFamily="34" charset="0"/>
+                <a:cs typeface="Arial" panose="020B0604020202020204" pitchFamily="34" charset="0"/>
+              </a:rPr>
+              <a:t>A transparent and public friendly tool, gamified for maximum engagement and trust</a:t>
+            </a:r>
+          </a:p>
+          <a:p>
+            <a:pPr lvl="1"/>
+            <a:r>
+              <a:rPr lang="en-GB" sz="1200" dirty="0">
+                <a:latin typeface="Arial" panose="020B0604020202020204" pitchFamily="34" charset="0"/>
+                <a:cs typeface="Arial" panose="020B0604020202020204" pitchFamily="34" charset="0"/>
+              </a:rPr>
+              <a:t>See how working </a:t>
+            </a:r>
+            <a:r>
+              <a:rPr lang="en-GB" sz="1200" dirty="0" err="1">
+                <a:latin typeface="Arial" panose="020B0604020202020204" pitchFamily="34" charset="0"/>
+                <a:cs typeface="Arial" panose="020B0604020202020204" pitchFamily="34" charset="0"/>
+              </a:rPr>
+              <a:t>onbalance</a:t>
+            </a:r>
+            <a:r>
+              <a:rPr lang="en-GB" sz="1200" dirty="0">
+                <a:latin typeface="Arial" panose="020B0604020202020204" pitchFamily="34" charset="0"/>
+                <a:cs typeface="Arial" panose="020B0604020202020204" pitchFamily="34" charset="0"/>
+              </a:rPr>
+              <a:t> can be personalised in real time according to individual priorities</a:t>
+            </a:r>
+          </a:p>
+          <a:p>
+            <a:pPr lvl="1"/>
+            <a:r>
+              <a:rPr lang="en-GB" sz="1200" dirty="0">
+                <a:latin typeface="Arial" panose="020B0604020202020204" pitchFamily="34" charset="0"/>
+                <a:cs typeface="Arial" panose="020B0604020202020204" pitchFamily="34" charset="0"/>
+              </a:rPr>
+              <a:t>Education tool</a:t>
+            </a:r>
+          </a:p>
+          <a:p>
+            <a:pPr lvl="1"/>
+            <a:endParaRPr lang="en-GB" sz="1200" dirty="0">
+              <a:latin typeface="Arial" panose="020B0604020202020204" pitchFamily="34" charset="0"/>
+              <a:cs typeface="Arial" panose="020B0604020202020204" pitchFamily="34" charset="0"/>
+            </a:endParaRPr>
+          </a:p>
+          <a:p>
+            <a:pPr lvl="1"/>
+            <a:endParaRPr lang="en-GB" sz="1200" dirty="0">
+              <a:latin typeface="Arial" panose="020B0604020202020204" pitchFamily="34" charset="0"/>
+              <a:cs typeface="Arial" panose="020B0604020202020204" pitchFamily="34" charset="0"/>
+            </a:endParaRPr>
+          </a:p>
+        </p:txBody>
+      </p:sp>
+    </p:spTree>
+    <p:extLst>
+      <p:ext uri="{BB962C8B-B14F-4D97-AF65-F5344CB8AC3E}">
+        <p14:creationId xmlns:p14="http://schemas.microsoft.com/office/powerpoint/2010/main" val="2295629019"/>
+      </p:ext>
+    </p:extLst>
+  </p:cSld>
+  <p:clrMapOvr>
+    <a:masterClrMapping/>
+  </p:clrMapOvr>
+</p:sld>
+</file>
+
+<file path=ppt/slides/slide3.xml><?xml version="1.0" encoding="utf-8"?>
+<p:sld xmlns:a="http://schemas.openxmlformats.org/drawingml/2006/main" xmlns:r="http://schemas.openxmlformats.org/officeDocument/2006/relationships" xmlns:p="http://schemas.openxmlformats.org/presentationml/2006/main">
+  <p:cSld>
+    <p:spTree>
+      <p:nvGrpSpPr>
+        <p:cNvPr id="1" name=""/>
+        <p:cNvGrpSpPr/>
+        <p:nvPr/>
+      </p:nvGrpSpPr>
+      <p:grpSpPr>
+        <a:xfrm>
+          <a:off x="0" y="0"/>
+          <a:ext cx="0" cy="0"/>
+          <a:chOff x="0" y="0"/>
+          <a:chExt cx="0" cy="0"/>
+        </a:xfrm>
+      </p:grpSpPr>
+      <p:sp>
+        <p:nvSpPr>
+          <p:cNvPr id="2" name="Title 1">
+            <a:extLst>
+              <a:ext uri="{FF2B5EF4-FFF2-40B4-BE49-F238E27FC236}">
+                <a16:creationId xmlns:a16="http://schemas.microsoft.com/office/drawing/2014/main" id="{F09F16E9-24A6-FC57-14AD-C66A048A88D3}"/>
+              </a:ext>
+            </a:extLst>
+          </p:cNvPr>
+          <p:cNvSpPr>
+            <a:spLocks noGrp="1"/>
+          </p:cNvSpPr>
+          <p:nvPr>
+            <p:ph type="title"/>
+          </p:nvPr>
+        </p:nvSpPr>
+        <p:spPr/>
+        <p:txBody>
+          <a:bodyPr/>
+          <a:lstStyle/>
+          <a:p>
+            <a:r>
+              <a:rPr lang="en-GB" dirty="0"/>
+              <a:t>DEMO</a:t>
+            </a:r>
+          </a:p>
+        </p:txBody>
+      </p:sp>
+      <p:sp>
+        <p:nvSpPr>
+          <p:cNvPr id="3" name="Content Placeholder 2">
+            <a:extLst>
+              <a:ext uri="{FF2B5EF4-FFF2-40B4-BE49-F238E27FC236}">
+                <a16:creationId xmlns:a16="http://schemas.microsoft.com/office/drawing/2014/main" id="{73B7ACAE-A8C2-9FD3-A131-EA6D7D9F66DB}"/>
+              </a:ext>
+            </a:extLst>
+          </p:cNvPr>
+          <p:cNvSpPr>
+            <a:spLocks noGrp="1"/>
+          </p:cNvSpPr>
+          <p:nvPr>
+            <p:ph idx="1"/>
+          </p:nvPr>
+        </p:nvSpPr>
+        <p:spPr/>
+        <p:txBody>
+          <a:bodyPr/>
+          <a:lstStyle/>
+          <a:p>
+            <a:endParaRPr lang="en-GB"/>
+          </a:p>
+        </p:txBody>
+      </p:sp>
+    </p:spTree>
+    <p:extLst>
+      <p:ext uri="{BB962C8B-B14F-4D97-AF65-F5344CB8AC3E}">
+        <p14:creationId xmlns:p14="http://schemas.microsoft.com/office/powerpoint/2010/main" val="2271008998"/>
+      </p:ext>
+    </p:extLst>
+  </p:cSld>
+  <p:clrMapOvr>
+    <a:masterClrMapping/>
+  </p:clrMapOvr>
+</p:sld>
+</file>
+
+<file path=ppt/slides/slide4.xml><?xml version="1.0" encoding="utf-8"?>
+<p:sld xmlns:a="http://schemas.openxmlformats.org/drawingml/2006/main" xmlns:r="http://schemas.openxmlformats.org/officeDocument/2006/relationships" xmlns:p="http://schemas.openxmlformats.org/presentationml/2006/main">
+  <p:cSld>
+    <p:spTree>
+      <p:nvGrpSpPr>
+        <p:cNvPr id="1" name=""/>
+        <p:cNvGrpSpPr/>
+        <p:nvPr/>
+      </p:nvGrpSpPr>
+      <p:grpSpPr>
+        <a:xfrm>
+          <a:off x="0" y="0"/>
+          <a:ext cx="0" cy="0"/>
+          <a:chOff x="0" y="0"/>
+          <a:chExt cx="0" cy="0"/>
+        </a:xfrm>
+      </p:grpSpPr>
+      <p:sp>
+        <p:nvSpPr>
+          <p:cNvPr id="2" name="Title 1">
+            <a:extLst>
+              <a:ext uri="{FF2B5EF4-FFF2-40B4-BE49-F238E27FC236}">
+                <a16:creationId xmlns:a16="http://schemas.microsoft.com/office/drawing/2014/main" id="{AC94D270-1EE3-AAD4-1D3B-E06A0E238906}"/>
+              </a:ext>
+            </a:extLst>
+          </p:cNvPr>
+          <p:cNvSpPr>
+            <a:spLocks noGrp="1"/>
+          </p:cNvSpPr>
+          <p:nvPr>
+            <p:ph type="title"/>
+          </p:nvPr>
+        </p:nvSpPr>
+        <p:spPr/>
+        <p:txBody>
+          <a:bodyPr/>
+          <a:lstStyle/>
+          <a:p>
+            <a:r>
+              <a:rPr lang="en-GB" dirty="0"/>
+              <a:t>Next steps and key highlights</a:t>
+            </a:r>
+          </a:p>
+        </p:txBody>
+      </p:sp>
+      <p:sp>
+        <p:nvSpPr>
+          <p:cNvPr id="3" name="Content Placeholder 2">
+            <a:extLst>
+              <a:ext uri="{FF2B5EF4-FFF2-40B4-BE49-F238E27FC236}">
+                <a16:creationId xmlns:a16="http://schemas.microsoft.com/office/drawing/2014/main" id="{8C1C07D9-80B5-6ADD-A965-868D753D5C6C}"/>
+              </a:ext>
+            </a:extLst>
+          </p:cNvPr>
+          <p:cNvSpPr>
+            <a:spLocks noGrp="1"/>
+          </p:cNvSpPr>
+          <p:nvPr>
+            <p:ph idx="1"/>
+          </p:nvPr>
+        </p:nvSpPr>
+        <p:spPr/>
+        <p:txBody>
+          <a:bodyPr/>
+          <a:lstStyle/>
+          <a:p>
+            <a:r>
+              <a:rPr lang="en-GB" dirty="0"/>
+              <a:t>Data integration and availability – secondary uses</a:t>
+            </a:r>
+          </a:p>
+          <a:p>
+            <a:r>
+              <a:rPr lang="en-GB" dirty="0"/>
+              <a:t>Data collection and understanding of priorities of the public and stakeholders</a:t>
+            </a:r>
+          </a:p>
+          <a:p>
+            <a:r>
+              <a:rPr lang="en-GB" dirty="0"/>
+              <a:t>Integration with problem statement D, planning app digitisation tools and many more</a:t>
+            </a:r>
+          </a:p>
+          <a:p>
+            <a:r>
+              <a:rPr lang="en-GB" dirty="0"/>
+              <a:t>Additional layers – opportunities, more constraints</a:t>
+            </a:r>
+          </a:p>
+        </p:txBody>
+      </p:sp>
+    </p:spTree>
+    <p:extLst>
+      <p:ext uri="{BB962C8B-B14F-4D97-AF65-F5344CB8AC3E}">
+        <p14:creationId xmlns:p14="http://schemas.microsoft.com/office/powerpoint/2010/main" val="411123079"/>
+      </p:ext>
+    </p:extLst>
+  </p:cSld>
+  <p:clrMapOvr>
+    <a:masterClrMapping/>
+  </p:clrMapOvr>
+</p:sld>
+</file>
+
 <file path=ppt/theme/theme1.xml><?xml version="1.0" encoding="utf-8"?>
 <a:theme xmlns:a="http://schemas.openxmlformats.org/drawingml/2006/main" name="Office Theme">
   <a:themeElements>
